--- a/slides/bob-controlplane-talk.pptx
+++ b/slides/bob-controlplane-talk.pptx
@@ -1022,6 +1022,22 @@
               <a:t>Say it: "You didn't watch a slideware mesh. You built it - and it's provable."</a:t>
             </a:r>
           </a:p>
+          <a:p/>
+          <a:p>
+            <a:r>
+              <a:t>CAPTURED PROOF: docs/evidence/index.html - the whole run (build → govern → 4 controls)</a:t>
+            </a:r>
+          </a:p>
+          <a:p>
+            <a:r>
+              <a:t>with real gateway responses + Admin-UI screenshots + the 16/16 suite output. Open it</a:t>
+            </a:r>
+          </a:p>
+          <a:p>
+            <a:r>
+              <a:t>if a control ever refuses to fire live. Stage runbook: docs/dev-day-runsheet.md.</a:t>
+            </a:r>
+          </a:p>
         </p:txBody>
       </p:sp>
       <p:sp>
@@ -1835,6 +1851,32 @@
           <a:p>
             <a:r>
               <a:t>whole governed mesh with ONLY Bob installed - governance holds over the wire.</a:t>
+            </a:r>
+          </a:p>
+          <a:p/>
+          <a:p>
+            <a:r>
+              <a:t>CAN'T RUN IT LOCALLY? One-click "Open in GitHub Codespaces" badge in the README</a:t>
+            </a:r>
+          </a:p>
+          <a:p>
+            <a:r>
+              <a:t>(codespaces.new/manavgup/ai-agent-controlplane-demo) - the devcontainer auto-runs</a:t>
+            </a:r>
+          </a:p>
+          <a:p>
+            <a:r>
+              <a:t>`make up &amp;&amp; make seed` in the cloud; make port 4444 Public, then `make connect`.</a:t>
+            </a:r>
+          </a:p>
+          <a:p>
+            <a:r>
+              <a:t>GOTCHA: use the `-t http` + `/mcp` form (never SSE - Codespaces proxies buffer SSE,</a:t>
+            </a:r>
+          </a:p>
+          <a:p>
+            <a:r>
+              <a:t>so Bob hangs on connect). Tier 2 in docs/ONBOARDING.md.</a:t>
             </a:r>
           </a:p>
         </p:txBody>
